--- a/artifacts/speaking-portfolio-expanded/decks/failure-improvement-15min-handout.pptx
+++ b/artifacts/speaking-portfolio-expanded/decks/failure-improvement-15min-handout.pptx
@@ -650,53 +650,53 @@
                 <a:ea typeface="Arial"/>
                 <a:cs typeface="Arial"/>
               </a:rPr>
-              <a:t xml:space="preserve">This talk owns the offline improvement loop, including the people reviewing its output. The examples are teaching fixtures until I attach a production record. Runtime recovery belongs to Adaptive, agentic apps.</a:t>
-            </a:r>
-            <a:endParaRPr lang="en-US" sz="1200"/>
-          </a:p>
-          <a:p>
-            <a:pPr marL="0" indent="0">
-              <a:lnSpc>
-                <a:spcPts val="1560"/>
-              </a:lnSpc>
-              <a:spcAft>
-                <a:spcPts val="0"/>
-              </a:spcAft>
-              <a:buNone/>
-            </a:pPr>
-            <a:r>
-              <a:rPr lang="en-US" sz="1200" b="0">
-                <a:solidFill>
-                  <a:srgbClr val="202b33"/>
-                </a:solidFill>
-                <a:latin typeface="Arial"/>
-                <a:ea typeface="Arial"/>
-                <a:cs typeface="Arial"/>
-              </a:rPr>
-              <a:t xml:space="preserve"/>
-            </a:r>
-            <a:endParaRPr lang="en-US" sz="1200"/>
-          </a:p>
-          <a:p>
-            <a:pPr marL="0" indent="0">
-              <a:lnSpc>
-                <a:spcPts val="1560"/>
-              </a:lnSpc>
-              <a:spcAft>
-                <a:spcPts val="0"/>
-              </a:spcAft>
-              <a:buNone/>
-            </a:pPr>
-            <a:r>
-              <a:rPr lang="en-US" sz="1200" b="0">
-                <a:solidFill>
-                  <a:srgbClr val="202b33"/>
-                </a:solidFill>
-                <a:latin typeface="Arial"/>
-                <a:ea typeface="Arial"/>
-                <a:cs typeface="Arial"/>
-              </a:rPr>
-              <a:t xml:space="preserve">There is a name for training people to ignore the channel that is supposed to warn them. Alert fatigue. Cvach reviewed it in clinical monitoring. I am borrowing the mechanism, not claiming a hospital study measured your on-call rotation. If our new agent creates a ticket for every log line, we have automated the thing that made the logs unreadable.</a:t>
+              <a:t xml:space="preserve">This talk owns the offline improvement loop, including the people reviewing its output. The examples are teaching fixtures until I attach a production record. Runtime recovery, and how much authority a running agent earns for itself, belongs to Adaptive, agentic apps.</a:t>
+            </a:r>
+            <a:endParaRPr lang="en-US" sz="1200"/>
+          </a:p>
+          <a:p>
+            <a:pPr marL="0" indent="0">
+              <a:lnSpc>
+                <a:spcPts val="1560"/>
+              </a:lnSpc>
+              <a:spcAft>
+                <a:spcPts val="0"/>
+              </a:spcAft>
+              <a:buNone/>
+            </a:pPr>
+            <a:r>
+              <a:rPr lang="en-US" sz="1200" b="0">
+                <a:solidFill>
+                  <a:srgbClr val="202b33"/>
+                </a:solidFill>
+                <a:latin typeface="Arial"/>
+                <a:ea typeface="Arial"/>
+                <a:cs typeface="Arial"/>
+              </a:rPr>
+              <a:t xml:space="preserve"/>
+            </a:r>
+            <a:endParaRPr lang="en-US" sz="1200"/>
+          </a:p>
+          <a:p>
+            <a:pPr marL="0" indent="0">
+              <a:lnSpc>
+                <a:spcPts val="1560"/>
+              </a:lnSpc>
+              <a:spcAft>
+                <a:spcPts val="0"/>
+              </a:spcAft>
+              <a:buNone/>
+            </a:pPr>
+            <a:r>
+              <a:rPr lang="en-US" sz="1200" b="0">
+                <a:solidFill>
+                  <a:srgbClr val="202b33"/>
+                </a:solidFill>
+                <a:latin typeface="Arial"/>
+                <a:ea typeface="Arial"/>
+                <a:cs typeface="Arial"/>
+              </a:rPr>
+              <a:t xml:space="preserve">There is a name for training people to ignore the channel that is supposed to warn them. Alert fatigue. Cvach measured it on hospital monitors. Your pager is the same instrument. If our new agent creates a ticket for every log line, we have automated the thing that made the logs unreadable.</a:t>
             </a:r>
             <a:endParaRPr lang="en-US" sz="1200"/>
           </a:p>
@@ -2231,7 +2231,7 @@
                 <a:ea typeface="Arial"/>
                 <a:cs typeface="Arial"/>
               </a:rPr>
-              <a:t xml:space="preserve">Diane Vaughan called the organizational pattern normalization of deviance. Her Challenger analysis shows how repeated acceptance of anomalies made them ordinary. Our application is narrower: a repair loop needs evidence that the defect is gone, because successful workarounds are very persuasive evidence of the wrong thing.</a:t>
+              <a:t xml:space="preserve">Diane Vaughan called the organizational pattern normalization of deviance. Her Challenger analysis shows how repeated acceptance of anomalies made them ordinary. A repair loop needs evidence that the defect is gone. Successful workarounds are very persuasive evidence of the wrong thing.</a:t>
             </a:r>
             <a:endParaRPr lang="en-US" sz="1200"/>
           </a:p>
@@ -4523,7 +4523,7 @@
                 <a:ea typeface="Arial"/>
                 <a:cs typeface="Arial"/>
               </a:rPr>
-              <a:t xml:space="preserve">Replay the opening scroll beside the distilled artifact. End there.</a:t>
+              <a:t xml:space="preserve">Replay the opening scroll beside the distilled artifact. End there. Stop talking.</a:t>
             </a:r>
             <a:endParaRPr lang="en-US" sz="1200"/>
           </a:p>
@@ -6031,7 +6031,7 @@
                 <a:ea typeface="Arial"/>
                 <a:cs typeface="Arial"/>
               </a:rPr>
-              <a:t xml:space="preserve">Your logs are a roadmap nobody reads</a:t>
+              <a:t xml:space="preserve">Nobody reads the scroll</a:t>
             </a:r>
             <a:endParaRPr lang="en-US" sz="2550"/>
           </a:p>
@@ -6474,7 +6474,53 @@
                 <a:ea typeface="Arial"/>
                 <a:cs typeface="Arial"/>
               </a:rPr>
-              <a:t xml:space="preserve">recovery belongs to Adaptive, agentic apps.</a:t>
+              <a:t xml:space="preserve">recovery, and how much authority a running</a:t>
+            </a:r>
+            <a:endParaRPr lang="en-US" sz="1500"/>
+          </a:p>
+          <a:p>
+            <a:pPr marL="0" indent="0">
+              <a:lnSpc>
+                <a:spcPts val="1950"/>
+              </a:lnSpc>
+              <a:spcAft>
+                <a:spcPts val="0"/>
+              </a:spcAft>
+              <a:buNone/>
+            </a:pPr>
+            <a:r>
+              <a:rPr lang="en-US" sz="1500" b="0">
+                <a:solidFill>
+                  <a:srgbClr val="202B33"/>
+                </a:solidFill>
+                <a:latin typeface="Arial"/>
+                <a:ea typeface="Arial"/>
+                <a:cs typeface="Arial"/>
+              </a:rPr>
+              <a:t xml:space="preserve">agent earns for itself, belongs to</a:t>
+            </a:r>
+            <a:endParaRPr lang="en-US" sz="1500"/>
+          </a:p>
+          <a:p>
+            <a:pPr marL="0" indent="0">
+              <a:lnSpc>
+                <a:spcPts val="1950"/>
+              </a:lnSpc>
+              <a:spcAft>
+                <a:spcPts val="0"/>
+              </a:spcAft>
+              <a:buNone/>
+            </a:pPr>
+            <a:r>
+              <a:rPr lang="en-US" sz="1500" b="0">
+                <a:solidFill>
+                  <a:srgbClr val="202B33"/>
+                </a:solidFill>
+                <a:latin typeface="Arial"/>
+                <a:ea typeface="Arial"/>
+                <a:cs typeface="Arial"/>
+              </a:rPr>
+              <a:t xml:space="preserve">Adaptive, agentic apps.</a:t>
             </a:r>
             <a:endParaRPr lang="en-US" sz="1500"/>
           </a:p>
@@ -6566,145 +6612,122 @@
                 <a:ea typeface="Arial"/>
                 <a:cs typeface="Arial"/>
               </a:rPr>
-              <a:t xml:space="preserve">them. Alert fatigue. Cvach reviewed it in</a:t>
-            </a:r>
-            <a:endParaRPr lang="en-US" sz="1500"/>
-          </a:p>
-          <a:p>
-            <a:pPr marL="0" indent="0">
-              <a:lnSpc>
-                <a:spcPts val="1950"/>
-              </a:lnSpc>
-              <a:spcAft>
-                <a:spcPts val="0"/>
-              </a:spcAft>
-              <a:buNone/>
-            </a:pPr>
-            <a:r>
-              <a:rPr lang="en-US" sz="1500" b="0">
-                <a:solidFill>
-                  <a:srgbClr val="202B33"/>
-                </a:solidFill>
-                <a:latin typeface="Arial"/>
-                <a:ea typeface="Arial"/>
-                <a:cs typeface="Arial"/>
-              </a:rPr>
-              <a:t xml:space="preserve">clinical monitoring. I am borrowing the</a:t>
-            </a:r>
-            <a:endParaRPr lang="en-US" sz="1500"/>
-          </a:p>
-          <a:p>
-            <a:pPr marL="0" indent="0">
-              <a:lnSpc>
-                <a:spcPts val="1950"/>
-              </a:lnSpc>
-              <a:spcAft>
-                <a:spcPts val="0"/>
-              </a:spcAft>
-              <a:buNone/>
-            </a:pPr>
-            <a:r>
-              <a:rPr lang="en-US" sz="1500" b="0">
-                <a:solidFill>
-                  <a:srgbClr val="202B33"/>
-                </a:solidFill>
-                <a:latin typeface="Arial"/>
-                <a:ea typeface="Arial"/>
-                <a:cs typeface="Arial"/>
-              </a:rPr>
-              <a:t xml:space="preserve">mechanism, not claiming a hospital study</a:t>
-            </a:r>
-            <a:endParaRPr lang="en-US" sz="1500"/>
-          </a:p>
-          <a:p>
-            <a:pPr marL="0" indent="0">
-              <a:lnSpc>
-                <a:spcPts val="1950"/>
-              </a:lnSpc>
-              <a:spcAft>
-                <a:spcPts val="0"/>
-              </a:spcAft>
-              <a:buNone/>
-            </a:pPr>
-            <a:r>
-              <a:rPr lang="en-US" sz="1500" b="0">
-                <a:solidFill>
-                  <a:srgbClr val="202B33"/>
-                </a:solidFill>
-                <a:latin typeface="Arial"/>
-                <a:ea typeface="Arial"/>
-                <a:cs typeface="Arial"/>
-              </a:rPr>
-              <a:t xml:space="preserve">measured your on-call rotation. If our new</a:t>
-            </a:r>
-            <a:endParaRPr lang="en-US" sz="1500"/>
-          </a:p>
-          <a:p>
-            <a:pPr marL="0" indent="0">
-              <a:lnSpc>
-                <a:spcPts val="1950"/>
-              </a:lnSpc>
-              <a:spcAft>
-                <a:spcPts val="0"/>
-              </a:spcAft>
-              <a:buNone/>
-            </a:pPr>
-            <a:r>
-              <a:rPr lang="en-US" sz="1500" b="0">
-                <a:solidFill>
-                  <a:srgbClr val="202B33"/>
-                </a:solidFill>
-                <a:latin typeface="Arial"/>
-                <a:ea typeface="Arial"/>
-                <a:cs typeface="Arial"/>
-              </a:rPr>
-              <a:t xml:space="preserve">agent creates a ticket for every log line,</a:t>
-            </a:r>
-            <a:endParaRPr lang="en-US" sz="1500"/>
-          </a:p>
-          <a:p>
-            <a:pPr marL="0" indent="0">
-              <a:lnSpc>
-                <a:spcPts val="1950"/>
-              </a:lnSpc>
-              <a:spcAft>
-                <a:spcPts val="0"/>
-              </a:spcAft>
-              <a:buNone/>
-            </a:pPr>
-            <a:r>
-              <a:rPr lang="en-US" sz="1500" b="0">
-                <a:solidFill>
-                  <a:srgbClr val="202B33"/>
-                </a:solidFill>
-                <a:latin typeface="Arial"/>
-                <a:ea typeface="Arial"/>
-                <a:cs typeface="Arial"/>
-              </a:rPr>
-              <a:t xml:space="preserve">we have automated the thing that made the</a:t>
-            </a:r>
-            <a:endParaRPr lang="en-US" sz="1500"/>
-          </a:p>
-          <a:p>
-            <a:pPr marL="0" indent="0">
-              <a:lnSpc>
-                <a:spcPts val="1950"/>
-              </a:lnSpc>
-              <a:spcAft>
-                <a:spcPts val="0"/>
-              </a:spcAft>
-              <a:buNone/>
-            </a:pPr>
-            <a:r>
-              <a:rPr lang="en-US" sz="1500" b="0">
-                <a:solidFill>
-                  <a:srgbClr val="202B33"/>
-                </a:solidFill>
-                <a:latin typeface="Arial"/>
-                <a:ea typeface="Arial"/>
-                <a:cs typeface="Arial"/>
-              </a:rPr>
-              <a:t xml:space="preserve">logs unreadable.</a:t>
+              <a:t xml:space="preserve">them. Alert fatigue. Cvach measured it on</a:t>
+            </a:r>
+            <a:endParaRPr lang="en-US" sz="1500"/>
+          </a:p>
+          <a:p>
+            <a:pPr marL="0" indent="0">
+              <a:lnSpc>
+                <a:spcPts val="1950"/>
+              </a:lnSpc>
+              <a:spcAft>
+                <a:spcPts val="0"/>
+              </a:spcAft>
+              <a:buNone/>
+            </a:pPr>
+            <a:r>
+              <a:rPr lang="en-US" sz="1500" b="0">
+                <a:solidFill>
+                  <a:srgbClr val="202B33"/>
+                </a:solidFill>
+                <a:latin typeface="Arial"/>
+                <a:ea typeface="Arial"/>
+                <a:cs typeface="Arial"/>
+              </a:rPr>
+              <a:t xml:space="preserve">hospital monitors. Your pager is the same</a:t>
+            </a:r>
+            <a:endParaRPr lang="en-US" sz="1500"/>
+          </a:p>
+          <a:p>
+            <a:pPr marL="0" indent="0">
+              <a:lnSpc>
+                <a:spcPts val="1950"/>
+              </a:lnSpc>
+              <a:spcAft>
+                <a:spcPts val="0"/>
+              </a:spcAft>
+              <a:buNone/>
+            </a:pPr>
+            <a:r>
+              <a:rPr lang="en-US" sz="1500" b="0">
+                <a:solidFill>
+                  <a:srgbClr val="202B33"/>
+                </a:solidFill>
+                <a:latin typeface="Arial"/>
+                <a:ea typeface="Arial"/>
+                <a:cs typeface="Arial"/>
+              </a:rPr>
+              <a:t xml:space="preserve">instrument. If our new agent creates a</a:t>
+            </a:r>
+            <a:endParaRPr lang="en-US" sz="1500"/>
+          </a:p>
+          <a:p>
+            <a:pPr marL="0" indent="0">
+              <a:lnSpc>
+                <a:spcPts val="1950"/>
+              </a:lnSpc>
+              <a:spcAft>
+                <a:spcPts val="0"/>
+              </a:spcAft>
+              <a:buNone/>
+            </a:pPr>
+            <a:r>
+              <a:rPr lang="en-US" sz="1500" b="0">
+                <a:solidFill>
+                  <a:srgbClr val="202B33"/>
+                </a:solidFill>
+                <a:latin typeface="Arial"/>
+                <a:ea typeface="Arial"/>
+                <a:cs typeface="Arial"/>
+              </a:rPr>
+              <a:t xml:space="preserve">ticket for every log line, we have</a:t>
+            </a:r>
+            <a:endParaRPr lang="en-US" sz="1500"/>
+          </a:p>
+          <a:p>
+            <a:pPr marL="0" indent="0">
+              <a:lnSpc>
+                <a:spcPts val="1950"/>
+              </a:lnSpc>
+              <a:spcAft>
+                <a:spcPts val="0"/>
+              </a:spcAft>
+              <a:buNone/>
+            </a:pPr>
+            <a:r>
+              <a:rPr lang="en-US" sz="1500" b="0">
+                <a:solidFill>
+                  <a:srgbClr val="202B33"/>
+                </a:solidFill>
+                <a:latin typeface="Arial"/>
+                <a:ea typeface="Arial"/>
+                <a:cs typeface="Arial"/>
+              </a:rPr>
+              <a:t xml:space="preserve">automated the thing that made the logs</a:t>
+            </a:r>
+            <a:endParaRPr lang="en-US" sz="1500"/>
+          </a:p>
+          <a:p>
+            <a:pPr marL="0" indent="0">
+              <a:lnSpc>
+                <a:spcPts val="1950"/>
+              </a:lnSpc>
+              <a:spcAft>
+                <a:spcPts val="0"/>
+              </a:spcAft>
+              <a:buNone/>
+            </a:pPr>
+            <a:r>
+              <a:rPr lang="en-US" sz="1500" b="0">
+                <a:solidFill>
+                  <a:srgbClr val="202B33"/>
+                </a:solidFill>
+                <a:latin typeface="Arial"/>
+                <a:ea typeface="Arial"/>
+                <a:cs typeface="Arial"/>
+              </a:rPr>
+              <a:t xml:space="preserve">unreadable.</a:t>
             </a:r>
             <a:endParaRPr lang="en-US" sz="1500"/>
           </a:p>
@@ -9097,76 +9120,76 @@
                 <a:ea typeface="Arial"/>
                 <a:cs typeface="Arial"/>
               </a:rPr>
-              <a:t xml:space="preserve">Our application is narrower: a repair loop</a:t>
-            </a:r>
-            <a:endParaRPr lang="en-US" sz="1500"/>
-          </a:p>
-          <a:p>
-            <a:pPr marL="0" indent="0">
-              <a:lnSpc>
-                <a:spcPts val="1950"/>
-              </a:lnSpc>
-              <a:spcAft>
-                <a:spcPts val="0"/>
-              </a:spcAft>
-              <a:buNone/>
-            </a:pPr>
-            <a:r>
-              <a:rPr lang="en-US" sz="1500" b="0">
-                <a:solidFill>
-                  <a:srgbClr val="202B33"/>
-                </a:solidFill>
-                <a:latin typeface="Arial"/>
-                <a:ea typeface="Arial"/>
-                <a:cs typeface="Arial"/>
-              </a:rPr>
-              <a:t xml:space="preserve">needs evidence that the defect is gone,</a:t>
-            </a:r>
-            <a:endParaRPr lang="en-US" sz="1500"/>
-          </a:p>
-          <a:p>
-            <a:pPr marL="0" indent="0">
-              <a:lnSpc>
-                <a:spcPts val="1950"/>
-              </a:lnSpc>
-              <a:spcAft>
-                <a:spcPts val="0"/>
-              </a:spcAft>
-              <a:buNone/>
-            </a:pPr>
-            <a:r>
-              <a:rPr lang="en-US" sz="1500" b="0">
-                <a:solidFill>
-                  <a:srgbClr val="202B33"/>
-                </a:solidFill>
-                <a:latin typeface="Arial"/>
-                <a:ea typeface="Arial"/>
-                <a:cs typeface="Arial"/>
-              </a:rPr>
-              <a:t xml:space="preserve">because successful workarounds are very</a:t>
-            </a:r>
-            <a:endParaRPr lang="en-US" sz="1500"/>
-          </a:p>
-          <a:p>
-            <a:pPr marL="0" indent="0">
-              <a:lnSpc>
-                <a:spcPts val="1950"/>
-              </a:lnSpc>
-              <a:spcAft>
-                <a:spcPts val="0"/>
-              </a:spcAft>
-              <a:buNone/>
-            </a:pPr>
-            <a:r>
-              <a:rPr lang="en-US" sz="1500" b="0">
-                <a:solidFill>
-                  <a:srgbClr val="202B33"/>
-                </a:solidFill>
-                <a:latin typeface="Arial"/>
-                <a:ea typeface="Arial"/>
-                <a:cs typeface="Arial"/>
-              </a:rPr>
-              <a:t xml:space="preserve">persuasive evidence of the wrong thing.</a:t>
+              <a:t xml:space="preserve">A repair loop needs evidence that the</a:t>
+            </a:r>
+            <a:endParaRPr lang="en-US" sz="1500"/>
+          </a:p>
+          <a:p>
+            <a:pPr marL="0" indent="0">
+              <a:lnSpc>
+                <a:spcPts val="1950"/>
+              </a:lnSpc>
+              <a:spcAft>
+                <a:spcPts val="0"/>
+              </a:spcAft>
+              <a:buNone/>
+            </a:pPr>
+            <a:r>
+              <a:rPr lang="en-US" sz="1500" b="0">
+                <a:solidFill>
+                  <a:srgbClr val="202B33"/>
+                </a:solidFill>
+                <a:latin typeface="Arial"/>
+                <a:ea typeface="Arial"/>
+                <a:cs typeface="Arial"/>
+              </a:rPr>
+              <a:t xml:space="preserve">defect is gone. Successful workarounds are</a:t>
+            </a:r>
+            <a:endParaRPr lang="en-US" sz="1500"/>
+          </a:p>
+          <a:p>
+            <a:pPr marL="0" indent="0">
+              <a:lnSpc>
+                <a:spcPts val="1950"/>
+              </a:lnSpc>
+              <a:spcAft>
+                <a:spcPts val="0"/>
+              </a:spcAft>
+              <a:buNone/>
+            </a:pPr>
+            <a:r>
+              <a:rPr lang="en-US" sz="1500" b="0">
+                <a:solidFill>
+                  <a:srgbClr val="202B33"/>
+                </a:solidFill>
+                <a:latin typeface="Arial"/>
+                <a:ea typeface="Arial"/>
+                <a:cs typeface="Arial"/>
+              </a:rPr>
+              <a:t xml:space="preserve">very persuasive evidence of the wrong</a:t>
+            </a:r>
+            <a:endParaRPr lang="en-US" sz="1500"/>
+          </a:p>
+          <a:p>
+            <a:pPr marL="0" indent="0">
+              <a:lnSpc>
+                <a:spcPts val="1950"/>
+              </a:lnSpc>
+              <a:spcAft>
+                <a:spcPts val="0"/>
+              </a:spcAft>
+              <a:buNone/>
+            </a:pPr>
+            <a:r>
+              <a:rPr lang="en-US" sz="1500" b="0">
+                <a:solidFill>
+                  <a:srgbClr val="202B33"/>
+                </a:solidFill>
+                <a:latin typeface="Arial"/>
+                <a:ea typeface="Arial"/>
+                <a:cs typeface="Arial"/>
+              </a:rPr>
+              <a:t xml:space="preserve">thing.</a:t>
             </a:r>
             <a:endParaRPr lang="en-US" sz="1500"/>
           </a:p>

--- a/artifacts/speaking-portfolio-expanded/decks/failure-improvement-15min-handout.pptx
+++ b/artifacts/speaking-portfolio-expanded/decks/failure-improvement-15min-handout.pptx
@@ -466,7 +466,7 @@
                 <a:ea typeface="Arial"/>
                 <a:cs typeface="Arial"/>
               </a:rPr>
-              <a:t xml:space="preserve">Source slide 1. 00:00 to 01:00</a:t>
+              <a:t xml:space="preserve">Source slide 1. 00:00 to 01:45</a:t>
             </a:r>
             <a:endParaRPr lang="en-US" sz="1200"/>
           </a:p>
@@ -993,7 +993,7 @@
                 <a:ea typeface="Arial"/>
                 <a:cs typeface="Arial"/>
               </a:rPr>
-              <a:t xml:space="preserve">Source slide 2. 01:00 to 02:00</a:t>
+              <a:t xml:space="preserve">Source slide 2. 01:45 to 03:15</a:t>
             </a:r>
             <a:endParaRPr lang="en-US" sz="1200"/>
           </a:p>
@@ -1474,7 +1474,7 @@
                 <a:ea typeface="Arial"/>
                 <a:cs typeface="Arial"/>
               </a:rPr>
-              <a:t xml:space="preserve">Source slide 4. 02:00 to 03:30</a:t>
+              <a:t xml:space="preserve">Source slide 4. 03:15 to 04:45</a:t>
             </a:r>
             <a:endParaRPr lang="en-US" sz="1200"/>
           </a:p>
@@ -1955,7 +1955,7 @@
                 <a:ea typeface="Arial"/>
                 <a:cs typeface="Arial"/>
               </a:rPr>
-              <a:t xml:space="preserve">Source slide 6. 03:30 to 05:30</a:t>
+              <a:t xml:space="preserve">Source slide 6. 04:45 to 06:15</a:t>
             </a:r>
             <a:endParaRPr lang="en-US" sz="1200"/>
           </a:p>
@@ -2528,7 +2528,7 @@
                 <a:ea typeface="Arial"/>
                 <a:cs typeface="Arial"/>
               </a:rPr>
-              <a:t xml:space="preserve">Source slide 8. 05:30 to 09:30</a:t>
+              <a:t xml:space="preserve">Source slide 8. 06:15 to 09:45</a:t>
             </a:r>
             <a:endParaRPr lang="en-US" sz="1200"/>
           </a:p>
@@ -3101,7 +3101,7 @@
                 <a:ea typeface="Arial"/>
                 <a:cs typeface="Arial"/>
               </a:rPr>
-              <a:t xml:space="preserve">Source slide 9. 09:30 to 11:30</a:t>
+              <a:t xml:space="preserve">Source slide 9. 09:45 to 12:00</a:t>
             </a:r>
             <a:endParaRPr lang="en-US" sz="1200"/>
           </a:p>
@@ -3674,7 +3674,7 @@
                 <a:ea typeface="Arial"/>
                 <a:cs typeface="Arial"/>
               </a:rPr>
-              <a:t xml:space="preserve">Source slide 13. 11:30 to 13:30</a:t>
+              <a:t xml:space="preserve">Source slide 13. 12:00 to 13:45</a:t>
             </a:r>
             <a:endParaRPr lang="en-US" sz="1200"/>
           </a:p>
@@ -4201,7 +4201,7 @@
                 <a:ea typeface="Arial"/>
                 <a:cs typeface="Arial"/>
               </a:rPr>
-              <a:t xml:space="preserve">Source slide 15. 13:30 to 15:00</a:t>
+              <a:t xml:space="preserve">Source slide 15. 13:45 to 15:00</a:t>
             </a:r>
             <a:endParaRPr lang="en-US" sz="1200"/>
           </a:p>
